--- a/Thesis/StefanWernerBachelorPresentationReduced.pptx
+++ b/Thesis/StefanWernerBachelorPresentationReduced.pptx
@@ -2771,7 +2771,7 @@
           <a:p>
             <a:fld id="{177B9070-9281-4B15-842B-9B135EE24603}" type="datetimeFigureOut">
               <a:rPr lang="de-AT" smtClean="0"/>
-              <a:t>11.06.2026</a:t>
+              <a:t>12.06.2026</a:t>
             </a:fld>
             <a:endParaRPr lang="de-AT"/>
           </a:p>
@@ -2936,7 +2936,7 @@
           <a:p>
             <a:fld id="{843A4CAD-2332-440A-B5F3-F5F26A7FAEC2}" type="datetimeFigureOut">
               <a:rPr lang="en-US" smtClean="0"/>
-              <a:t>6/11/2026</a:t>
+              <a:t>6/12/2026</a:t>
             </a:fld>
             <a:endParaRPr lang="en-US"/>
           </a:p>
@@ -8998,14 +8998,12 @@
             </a:extLst>
           </a:blip>
           <a:srcRect/>
-          <a:stretch>
-            <a:fillRect/>
-          </a:stretch>
+          <a:stretch/>
         </p:blipFill>
         <p:spPr bwMode="auto">
           <a:xfrm>
-            <a:off x="283221" y="2230329"/>
-            <a:ext cx="4373488" cy="2427171"/>
+            <a:off x="285511" y="2230329"/>
+            <a:ext cx="4368907" cy="2427171"/>
           </a:xfrm>
           <a:prstGeom prst="rect">
             <a:avLst/>
@@ -10390,12 +10388,9 @@
 </file>
 
 <file path=customXml/item1.xml><?xml version="1.0" encoding="utf-8"?>
-<?mso-contentType ?>
-<FormTemplates xmlns="http://schemas.microsoft.com/sharepoint/v3/contenttype/forms">
-  <Display>DocumentLibraryForm</Display>
-  <Edit>DocumentLibraryForm</Edit>
-  <New>DocumentLibraryForm</New>
-</FormTemplates>
+<p:properties xmlns:p="http://schemas.microsoft.com/office/2006/metadata/properties" xmlns:xsi="http://www.w3.org/2001/XMLSchema-instance" xmlns:pc="http://schemas.microsoft.com/office/infopath/2007/PartnerControls">
+  <documentManagement/>
+</p:properties>
 </file>
 
 <file path=customXml/item2.xml><?xml version="1.0" encoding="utf-8"?>
@@ -10549,15 +10544,26 @@
 </file>
 
 <file path=customXml/item3.xml><?xml version="1.0" encoding="utf-8"?>
-<p:properties xmlns:p="http://schemas.microsoft.com/office/2006/metadata/properties" xmlns:xsi="http://www.w3.org/2001/XMLSchema-instance" xmlns:pc="http://schemas.microsoft.com/office/infopath/2007/PartnerControls">
-  <documentManagement/>
-</p:properties>
+<?mso-contentType ?>
+<FormTemplates xmlns="http://schemas.microsoft.com/sharepoint/v3/contenttype/forms">
+  <Display>DocumentLibraryForm</Display>
+  <Edit>DocumentLibraryForm</Edit>
+  <New>DocumentLibraryForm</New>
+</FormTemplates>
 </file>
 
 <file path=customXml/itemProps1.xml><?xml version="1.0" encoding="utf-8"?>
-<ds:datastoreItem xmlns:ds="http://schemas.openxmlformats.org/officeDocument/2006/customXml" ds:itemID="{DB66ED67-DB0D-40B3-9F54-7F30370BB7A1}">
+<ds:datastoreItem xmlns:ds="http://schemas.openxmlformats.org/officeDocument/2006/customXml" ds:itemID="{EE70B53E-5918-4A48-B895-E57A7C6FD7C8}">
   <ds:schemaRefs>
-    <ds:schemaRef ds:uri="http://schemas.microsoft.com/sharepoint/v3/contenttype/forms"/>
+    <ds:schemaRef ds:uri="http://www.w3.org/XML/1998/namespace"/>
+    <ds:schemaRef ds:uri="http://purl.org/dc/terms/"/>
+    <ds:schemaRef ds:uri="http://purl.org/dc/dcmitype/"/>
+    <ds:schemaRef ds:uri="http://purl.org/dc/elements/1.1/"/>
+    <ds:schemaRef ds:uri="0cfff6e3-632b-49cb-b70b-702b936689ff"/>
+    <ds:schemaRef ds:uri="http://schemas.microsoft.com/office/2006/documentManagement/types"/>
+    <ds:schemaRef ds:uri="http://schemas.microsoft.com/office/2006/metadata/properties"/>
+    <ds:schemaRef ds:uri="http://schemas.microsoft.com/office/infopath/2007/PartnerControls"/>
+    <ds:schemaRef ds:uri="http://schemas.openxmlformats.org/package/2006/metadata/core-properties"/>
   </ds:schemaRefs>
 </ds:datastoreItem>
 </file>
@@ -10581,17 +10587,9 @@
 </file>
 
 <file path=customXml/itemProps3.xml><?xml version="1.0" encoding="utf-8"?>
-<ds:datastoreItem xmlns:ds="http://schemas.openxmlformats.org/officeDocument/2006/customXml" ds:itemID="{EE70B53E-5918-4A48-B895-E57A7C6FD7C8}">
+<ds:datastoreItem xmlns:ds="http://schemas.openxmlformats.org/officeDocument/2006/customXml" ds:itemID="{DB66ED67-DB0D-40B3-9F54-7F30370BB7A1}">
   <ds:schemaRefs>
-    <ds:schemaRef ds:uri="http://www.w3.org/XML/1998/namespace"/>
-    <ds:schemaRef ds:uri="http://purl.org/dc/terms/"/>
-    <ds:schemaRef ds:uri="http://purl.org/dc/dcmitype/"/>
-    <ds:schemaRef ds:uri="http://purl.org/dc/elements/1.1/"/>
-    <ds:schemaRef ds:uri="0cfff6e3-632b-49cb-b70b-702b936689ff"/>
-    <ds:schemaRef ds:uri="http://schemas.microsoft.com/office/2006/documentManagement/types"/>
-    <ds:schemaRef ds:uri="http://schemas.microsoft.com/office/2006/metadata/properties"/>
-    <ds:schemaRef ds:uri="http://schemas.microsoft.com/office/infopath/2007/PartnerControls"/>
-    <ds:schemaRef ds:uri="http://schemas.openxmlformats.org/package/2006/metadata/core-properties"/>
+    <ds:schemaRef ds:uri="http://schemas.microsoft.com/sharepoint/v3/contenttype/forms"/>
   </ds:schemaRefs>
 </ds:datastoreItem>
 </file>